--- a/public/fun/pack/pptx/wedding/결혼식_16_소개중심_평상수박.pptx
+++ b/public/fun/pack/pptx/wedding/결혼식_16_소개중심_평상수박.pptx
@@ -3347,7 +3347,7 @@
             <a:r>
               <a:rPr sz="3600" b="1" i="0">
                 <a:solidFill>
-                  <a:srgbClr val="153C26"/>
+                  <a:srgbClr val="115F59"/>
                 </a:solidFill>
               </a:rPr>
               <a:t>저희 결혼합니다</a:t>
@@ -3385,7 +3385,7 @@
             <a:r>
               <a:rPr sz="1700" b="0" i="1">
                 <a:solidFill>
-                  <a:srgbClr val="153C26"/>
+                  <a:srgbClr val="115F59"/>
                 </a:solidFill>
               </a:rPr>
               <a:t>부모님께 먼저 말씀드리고 날을 잡았습니다</a:t>
@@ -3460,7 +3460,7 @@
     <p:bg>
       <p:bgPr>
         <a:solidFill>
-          <a:srgbClr val="F0FAF4"/>
+          <a:srgbClr val="EEFCFB"/>
         </a:solidFill>
         <a:effectLst/>
       </p:bgPr>
@@ -3489,7 +3489,7 @@
           <a:noFill/>
           <a:ln w="28575">
             <a:solidFill>
-              <a:srgbClr val="308854"/>
+              <a:srgbClr val="26C5B8"/>
             </a:solidFill>
           </a:ln>
         </p:spPr>
@@ -3518,7 +3518,7 @@
           <a:noFill/>
           <a:ln w="9525">
             <a:solidFill>
-              <a:srgbClr val="D0F1DE"/>
+              <a:srgbClr val="D1FAF7"/>
             </a:solidFill>
           </a:ln>
         </p:spPr>
@@ -3560,7 +3560,7 @@
             <a:r>
               <a:rPr sz="3000" b="1" i="0">
                 <a:solidFill>
-                  <a:srgbClr val="153C26"/>
+                  <a:srgbClr val="115F59"/>
                 </a:solidFill>
               </a:rPr>
               <a:t>신랑 · 신부 소개</a:t>
@@ -3583,11 +3583,11 @@
             <a:avLst/>
           </a:prstGeom>
           <a:solidFill>
-            <a:srgbClr val="D0F1DE"/>
+            <a:srgbClr val="D1FAF7"/>
           </a:solidFill>
           <a:ln w="19050">
             <a:solidFill>
-              <a:srgbClr val="308854"/>
+              <a:srgbClr val="26C5B8"/>
             </a:solidFill>
             <a:prstDash val="dash"/>
           </a:ln>
@@ -3606,7 +3606,7 @@
             <a:r>
               <a:rPr sz="1200" b="0" i="0">
                 <a:solidFill>
-                  <a:srgbClr val="153C26"/>
+                  <a:srgbClr val="115F59"/>
                 </a:solidFill>
               </a:rPr>
               <a:t>사진</a:t>
@@ -3644,7 +3644,7 @@
             <a:r>
               <a:rPr sz="1600" b="1" i="0">
                 <a:solidFill>
-                  <a:srgbClr val="153C26"/>
+                  <a:srgbClr val="115F59"/>
                 </a:solidFill>
               </a:rPr>
               <a:t>신랑</a:t>
@@ -3735,11 +3735,11 @@
             <a:avLst/>
           </a:prstGeom>
           <a:solidFill>
-            <a:srgbClr val="D0F1DE"/>
+            <a:srgbClr val="D1FAF7"/>
           </a:solidFill>
           <a:ln w="19050">
             <a:solidFill>
-              <a:srgbClr val="308854"/>
+              <a:srgbClr val="26C5B8"/>
             </a:solidFill>
             <a:prstDash val="dash"/>
           </a:ln>
@@ -3758,7 +3758,7 @@
             <a:r>
               <a:rPr sz="1200" b="0" i="0">
                 <a:solidFill>
-                  <a:srgbClr val="153C26"/>
+                  <a:srgbClr val="115F59"/>
                 </a:solidFill>
               </a:rPr>
               <a:t>사진</a:t>
@@ -3796,7 +3796,7 @@
             <a:r>
               <a:rPr sz="1600" b="1" i="0">
                 <a:solidFill>
-                  <a:srgbClr val="153C26"/>
+                  <a:srgbClr val="115F59"/>
                 </a:solidFill>
               </a:rPr>
               <a:t>신부</a:t>
@@ -3886,7 +3886,7 @@
     <p:bg>
       <p:bgPr>
         <a:solidFill>
-          <a:srgbClr val="F0FAF4"/>
+          <a:srgbClr val="EEFCFB"/>
         </a:solidFill>
         <a:effectLst/>
       </p:bgPr>
@@ -3915,7 +3915,7 @@
           <a:noFill/>
           <a:ln w="28575">
             <a:solidFill>
-              <a:srgbClr val="308854"/>
+              <a:srgbClr val="26C5B8"/>
             </a:solidFill>
           </a:ln>
         </p:spPr>
@@ -3944,7 +3944,7 @@
           <a:noFill/>
           <a:ln w="9525">
             <a:solidFill>
-              <a:srgbClr val="D0F1DE"/>
+              <a:srgbClr val="D1FAF7"/>
             </a:solidFill>
           </a:ln>
         </p:spPr>
@@ -3986,7 +3986,7 @@
             <a:r>
               <a:rPr sz="3000" b="1" i="0">
                 <a:solidFill>
-                  <a:srgbClr val="153C26"/>
+                  <a:srgbClr val="115F59"/>
                 </a:solidFill>
               </a:rPr>
               <a:t>우리 두 사람</a:t>
@@ -4011,11 +4011,11 @@
             </a:avLst>
           </a:prstGeom>
           <a:solidFill>
-            <a:srgbClr val="F0FAF4"/>
+            <a:srgbClr val="EEFCFB"/>
           </a:solidFill>
           <a:ln w="12700">
             <a:solidFill>
-              <a:srgbClr val="D0F1DE"/>
+              <a:srgbClr val="D1FAF7"/>
             </a:solidFill>
           </a:ln>
         </p:spPr>
@@ -4044,7 +4044,7 @@
             </a:avLst>
           </a:prstGeom>
           <a:solidFill>
-            <a:srgbClr val="308854"/>
+            <a:srgbClr val="26C5B8"/>
           </a:solidFill>
           <a:ln>
             <a:noFill/>
@@ -4196,11 +4196,11 @@
             </a:avLst>
           </a:prstGeom>
           <a:solidFill>
-            <a:srgbClr val="D0F1DE"/>
+            <a:srgbClr val="D1FAF7"/>
           </a:solidFill>
           <a:ln w="12700">
             <a:solidFill>
-              <a:srgbClr val="D0F1DE"/>
+              <a:srgbClr val="D1FAF7"/>
             </a:solidFill>
           </a:ln>
         </p:spPr>
@@ -4229,7 +4229,7 @@
             </a:avLst>
           </a:prstGeom>
           <a:solidFill>
-            <a:srgbClr val="153C26"/>
+            <a:srgbClr val="115F59"/>
           </a:solidFill>
           <a:ln>
             <a:noFill/>
@@ -4378,7 +4378,7 @@
     <p:bg>
       <p:bgPr>
         <a:solidFill>
-          <a:srgbClr val="F0FAF4"/>
+          <a:srgbClr val="EEFCFB"/>
         </a:solidFill>
         <a:effectLst/>
       </p:bgPr>
@@ -4407,7 +4407,7 @@
           <a:noFill/>
           <a:ln w="28575">
             <a:solidFill>
-              <a:srgbClr val="308854"/>
+              <a:srgbClr val="26C5B8"/>
             </a:solidFill>
           </a:ln>
         </p:spPr>
@@ -4436,7 +4436,7 @@
           <a:noFill/>
           <a:ln w="9525">
             <a:solidFill>
-              <a:srgbClr val="D0F1DE"/>
+              <a:srgbClr val="D1FAF7"/>
             </a:solidFill>
           </a:ln>
         </p:spPr>
@@ -4478,7 +4478,7 @@
             <a:r>
               <a:rPr sz="3000" b="1" i="0">
                 <a:solidFill>
-                  <a:srgbClr val="153C26"/>
+                  <a:srgbClr val="115F59"/>
                 </a:solidFill>
               </a:rPr>
               <a:t>서로에게 하고 싶은 말</a:t>
@@ -4503,11 +4503,11 @@
             </a:avLst>
           </a:prstGeom>
           <a:solidFill>
-            <a:srgbClr val="F0FAF4"/>
+            <a:srgbClr val="EEFCFB"/>
           </a:solidFill>
           <a:ln w="12700">
             <a:solidFill>
-              <a:srgbClr val="D0F1DE"/>
+              <a:srgbClr val="D1FAF7"/>
             </a:solidFill>
           </a:ln>
         </p:spPr>
@@ -4536,7 +4536,7 @@
             </a:avLst>
           </a:prstGeom>
           <a:solidFill>
-            <a:srgbClr val="308854"/>
+            <a:srgbClr val="26C5B8"/>
           </a:solidFill>
           <a:ln>
             <a:noFill/>
@@ -4648,11 +4648,11 @@
             </a:avLst>
           </a:prstGeom>
           <a:solidFill>
-            <a:srgbClr val="D0F1DE"/>
+            <a:srgbClr val="D1FAF7"/>
           </a:solidFill>
           <a:ln w="12700">
             <a:solidFill>
-              <a:srgbClr val="D0F1DE"/>
+              <a:srgbClr val="D1FAF7"/>
             </a:solidFill>
           </a:ln>
         </p:spPr>
@@ -4681,7 +4681,7 @@
             </a:avLst>
           </a:prstGeom>
           <a:solidFill>
-            <a:srgbClr val="153C26"/>
+            <a:srgbClr val="115F59"/>
           </a:solidFill>
           <a:ln>
             <a:noFill/>
@@ -4790,7 +4790,7 @@
     <p:bg>
       <p:bgPr>
         <a:solidFill>
-          <a:srgbClr val="F0FAF4"/>
+          <a:srgbClr val="EEFCFB"/>
         </a:solidFill>
         <a:effectLst/>
       </p:bgPr>
@@ -4819,7 +4819,7 @@
           <a:noFill/>
           <a:ln w="28575">
             <a:solidFill>
-              <a:srgbClr val="308854"/>
+              <a:srgbClr val="26C5B8"/>
             </a:solidFill>
           </a:ln>
         </p:spPr>
@@ -4848,7 +4848,7 @@
           <a:noFill/>
           <a:ln w="9525">
             <a:solidFill>
-              <a:srgbClr val="D0F1DE"/>
+              <a:srgbClr val="D1FAF7"/>
             </a:solidFill>
           </a:ln>
         </p:spPr>
@@ -4890,7 +4890,7 @@
             <a:r>
               <a:rPr sz="3000" b="1" i="0">
                 <a:solidFill>
-                  <a:srgbClr val="153C26"/>
+                  <a:srgbClr val="115F59"/>
                 </a:solidFill>
               </a:rPr>
               <a:t>웨딩 사진</a:t>
@@ -4915,11 +4915,11 @@
             </a:avLst>
           </a:prstGeom>
           <a:solidFill>
-            <a:srgbClr val="D0F1DE"/>
+            <a:srgbClr val="D1FAF7"/>
           </a:solidFill>
           <a:ln w="19050">
             <a:solidFill>
-              <a:srgbClr val="308854"/>
+              <a:srgbClr val="26C5B8"/>
             </a:solidFill>
             <a:prstDash val="dash"/>
           </a:ln>
@@ -4938,7 +4938,7 @@
             <a:r>
               <a:rPr sz="1200" b="0" i="0">
                 <a:solidFill>
-                  <a:srgbClr val="153C26"/>
+                  <a:srgbClr val="115F59"/>
                 </a:solidFill>
               </a:rPr>
               <a:t>사진 1</a:t>
@@ -4963,11 +4963,11 @@
             </a:avLst>
           </a:prstGeom>
           <a:solidFill>
-            <a:srgbClr val="D0F1DE"/>
+            <a:srgbClr val="D1FAF7"/>
           </a:solidFill>
           <a:ln w="19050">
             <a:solidFill>
-              <a:srgbClr val="308854"/>
+              <a:srgbClr val="26C5B8"/>
             </a:solidFill>
             <a:prstDash val="dash"/>
           </a:ln>
@@ -4986,7 +4986,7 @@
             <a:r>
               <a:rPr sz="1200" b="0" i="0">
                 <a:solidFill>
-                  <a:srgbClr val="153C26"/>
+                  <a:srgbClr val="115F59"/>
                 </a:solidFill>
               </a:rPr>
               <a:t>사진 2</a:t>
@@ -5011,11 +5011,11 @@
             </a:avLst>
           </a:prstGeom>
           <a:solidFill>
-            <a:srgbClr val="D0F1DE"/>
+            <a:srgbClr val="D1FAF7"/>
           </a:solidFill>
           <a:ln w="19050">
             <a:solidFill>
-              <a:srgbClr val="308854"/>
+              <a:srgbClr val="26C5B8"/>
             </a:solidFill>
             <a:prstDash val="dash"/>
           </a:ln>
@@ -5034,7 +5034,7 @@
             <a:r>
               <a:rPr sz="1200" b="0" i="0">
                 <a:solidFill>
-                  <a:srgbClr val="153C26"/>
+                  <a:srgbClr val="115F59"/>
                 </a:solidFill>
               </a:rPr>
               <a:t>사진 3</a:t>
@@ -5059,11 +5059,11 @@
             </a:avLst>
           </a:prstGeom>
           <a:solidFill>
-            <a:srgbClr val="D0F1DE"/>
+            <a:srgbClr val="D1FAF7"/>
           </a:solidFill>
           <a:ln w="19050">
             <a:solidFill>
-              <a:srgbClr val="308854"/>
+              <a:srgbClr val="26C5B8"/>
             </a:solidFill>
             <a:prstDash val="dash"/>
           </a:ln>
@@ -5082,7 +5082,7 @@
             <a:r>
               <a:rPr sz="1200" b="0" i="0">
                 <a:solidFill>
-                  <a:srgbClr val="153C26"/>
+                  <a:srgbClr val="115F59"/>
                 </a:solidFill>
               </a:rPr>
               <a:t>사진 4</a:t>
@@ -5107,11 +5107,11 @@
             </a:avLst>
           </a:prstGeom>
           <a:solidFill>
-            <a:srgbClr val="D0F1DE"/>
+            <a:srgbClr val="D1FAF7"/>
           </a:solidFill>
           <a:ln w="19050">
             <a:solidFill>
-              <a:srgbClr val="308854"/>
+              <a:srgbClr val="26C5B8"/>
             </a:solidFill>
             <a:prstDash val="dash"/>
           </a:ln>
@@ -5130,7 +5130,7 @@
             <a:r>
               <a:rPr sz="1200" b="0" i="0">
                 <a:solidFill>
-                  <a:srgbClr val="153C26"/>
+                  <a:srgbClr val="115F59"/>
                 </a:solidFill>
               </a:rPr>
               <a:t>사진 5</a:t>
@@ -5155,11 +5155,11 @@
             </a:avLst>
           </a:prstGeom>
           <a:solidFill>
-            <a:srgbClr val="D0F1DE"/>
+            <a:srgbClr val="D1FAF7"/>
           </a:solidFill>
           <a:ln w="19050">
             <a:solidFill>
-              <a:srgbClr val="308854"/>
+              <a:srgbClr val="26C5B8"/>
             </a:solidFill>
             <a:prstDash val="dash"/>
           </a:ln>
@@ -5178,7 +5178,7 @@
             <a:r>
               <a:rPr sz="1200" b="0" i="0">
                 <a:solidFill>
-                  <a:srgbClr val="153C26"/>
+                  <a:srgbClr val="115F59"/>
                 </a:solidFill>
               </a:rPr>
               <a:t>사진 6</a:t>
@@ -5258,7 +5258,7 @@
             <a:r>
               <a:rPr sz="3400" b="1" i="0">
                 <a:solidFill>
-                  <a:srgbClr val="153C26"/>
+                  <a:srgbClr val="115F59"/>
                 </a:solidFill>
               </a:rPr>
               <a:t>와 주셔서 고맙습니다</a:t>
@@ -5296,7 +5296,7 @@
             <a:r>
               <a:rPr sz="1700" b="0" i="1">
                 <a:solidFill>
-                  <a:srgbClr val="153C26"/>
+                  <a:srgbClr val="115F59"/>
                 </a:solidFill>
               </a:rPr>
               <a:t>잘 살겠습니다</a:t>
@@ -5361,34 +5361,34 @@
         <a:sysClr val="window" lastClr="FFFFFF"/>
       </a:lt1>
       <a:dk2>
-        <a:srgbClr val="153C26"/>
+        <a:srgbClr val="115F59"/>
       </a:dk2>
       <a:lt2>
-        <a:srgbClr val="F0FAF4"/>
+        <a:srgbClr val="EEFCFB"/>
       </a:lt2>
       <a:accent1>
-        <a:srgbClr val="308854"/>
+        <a:srgbClr val="26C5B8"/>
       </a:accent1>
       <a:accent2>
-        <a:srgbClr val="8A3B91"/>
+        <a:srgbClr val="209DB6"/>
       </a:accent2>
       <a:accent3>
-        <a:srgbClr val="153C26"/>
+        <a:srgbClr val="115F59"/>
       </a:accent3>
       <a:accent4>
-        <a:srgbClr val="D0F1DE"/>
+        <a:srgbClr val="D1FAF7"/>
       </a:accent4>
       <a:accent5>
-        <a:srgbClr val="5D6272"/>
+        <a:srgbClr val="23B1B7"/>
       </a:accent5>
       <a:accent6>
-        <a:srgbClr val="738A7D"/>
+        <a:srgbClr val="709F9B"/>
       </a:accent6>
       <a:hlink>
-        <a:srgbClr val="308854"/>
+        <a:srgbClr val="26C5B8"/>
       </a:hlink>
       <a:folHlink>
-        <a:srgbClr val="153C26"/>
+        <a:srgbClr val="115F59"/>
       </a:folHlink>
     </a:clrScheme>
     <a:fontScheme name="Office">

--- a/public/fun/pack/pptx/wedding/결혼식_16_소개중심_평상수박.pptx
+++ b/public/fun/pack/pptx/wedding/결혼식_16_소개중심_평상수박.pptx
@@ -3286,6 +3286,14 @@
 <file path=ppt/slides/slide1.xml><?xml version="1.0" encoding="utf-8"?>
 <p:sld xmlns:a="http://schemas.openxmlformats.org/drawingml/2006/main" xmlns:p="http://schemas.openxmlformats.org/presentationml/2006/main" xmlns:r="http://schemas.openxmlformats.org/officeDocument/2006/relationships">
   <p:cSld>
+    <p:bg>
+      <p:bgPr>
+        <a:solidFill>
+          <a:srgbClr val="EAFDF2"/>
+        </a:solidFill>
+        <a:effectLst/>
+      </p:bgPr>
+    </p:bg>
     <p:spTree>
       <p:nvGrpSpPr>
         <p:cNvPr id="1" name=""/>
@@ -3293,30 +3301,116 @@
         <p:nvPr/>
       </p:nvGrpSpPr>
       <p:grpSpPr/>
-      <p:pic>
-        <p:nvPicPr>
-          <p:cNvPr id="3" name="표지 그림" descr="wedding-16.jpg"/>
-          <p:cNvPicPr>
-            <a:picLocks noChangeAspect="1"/>
-          </p:cNvPicPr>
+      <p:sp>
+        <p:nvSpPr>
+          <p:cNvPr id="3" name="사진 자리"/>
+          <p:cNvSpPr/>
           <p:nvPr/>
-        </p:nvPicPr>
-        <p:blipFill>
-          <a:blip r:embed="rId2"/>
-          <a:stretch>
-            <a:fillRect/>
-          </a:stretch>
-        </p:blipFill>
-        <p:spPr>
-          <a:xfrm>
-            <a:off x="0" y="0"/>
-            <a:ext cx="12191695" cy="6858000"/>
+        </p:nvSpPr>
+        <p:spPr>
+          <a:xfrm>
+            <a:off x="7802684" y="0"/>
+            <a:ext cx="4389010" cy="6858000"/>
           </a:xfrm>
           <a:prstGeom prst="rect">
             <a:avLst/>
           </a:prstGeom>
-        </p:spPr>
-      </p:pic>
+          <a:solidFill>
+            <a:srgbClr val="A5F3C5"/>
+          </a:solidFill>
+          <a:ln>
+            <a:noFill/>
+          </a:ln>
+        </p:spPr>
+        <p:txBody>
+          <a:bodyPr rtlCol="0" anchor="ctr" wrap="square" lIns="54864" rIns="54864" tIns="27432" bIns="27432">
+            <a:noAutofit/>
+          </a:bodyPr>
+          <a:lstStyle/>
+          <a:p>
+            <a:pPr algn="ctr">
+              <a:lnSpc>
+                <a:spcPct val="100000"/>
+              </a:lnSpc>
+            </a:pPr>
+            <a:r>
+              <a:rPr sz="1400" b="0" i="0">
+                <a:solidFill>
+                  <a:srgbClr val="274935"/>
+                </a:solidFill>
+              </a:rPr>
+              <a:t>사진을 넣어 주세요</a:t>
+            </a:r>
+          </a:p>
+        </p:txBody>
+      </p:sp>
+      <p:sp>
+        <p:nvSpPr>
+          <p:cNvPr id="4" name="장식"/>
+          <p:cNvSpPr/>
+          <p:nvPr/>
+        </p:nvSpPr>
+        <p:spPr>
+          <a:xfrm>
+            <a:off x="8168435" y="365760"/>
+            <a:ext cx="3657508" cy="6126480"/>
+          </a:xfrm>
+          <a:prstGeom prst="rect">
+            <a:avLst/>
+          </a:prstGeom>
+          <a:noFill/>
+          <a:ln w="9525">
+            <a:solidFill>
+              <a:srgbClr val="26231F"/>
+            </a:solidFill>
+          </a:ln>
+        </p:spPr>
+        <p:txBody>
+          <a:bodyPr rtlCol="0" anchor="ctr"/>
+          <a:lstStyle/>
+          <a:p>
+            <a:pPr algn="ctr"/>
+          </a:p>
+        </p:txBody>
+      </p:sp>
+      <p:sp>
+        <p:nvSpPr>
+          <p:cNvPr id="5" name="라벨"/>
+          <p:cNvSpPr txBox="1"/>
+          <p:nvPr/>
+        </p:nvSpPr>
+        <p:spPr>
+          <a:xfrm>
+            <a:off x="822960" y="2148840"/>
+            <a:ext cx="5608179" cy="274320"/>
+          </a:xfrm>
+          <a:prstGeom prst="rect">
+            <a:avLst/>
+          </a:prstGeom>
+          <a:noFill/>
+        </p:spPr>
+        <p:txBody>
+          <a:bodyPr wrap="square" lIns="54864" rIns="54864" tIns="27432" bIns="27432" anchor="t">
+            <a:noAutofit/>
+          </a:bodyPr>
+          <a:lstStyle/>
+          <a:p>
+            <a:pPr algn="l">
+              <a:lnSpc>
+                <a:spcPct val="115000"/>
+              </a:lnSpc>
+            </a:pPr>
+            <a:r>
+              <a:rPr sz="1000" b="1" i="0" spc="250">
+                <a:solidFill>
+                  <a:srgbClr val="26231F"/>
+                </a:solidFill>
+              </a:rPr>
+              <a:t>WEDDING</a:t>
+            </a:r>
+          </a:p>
+        </p:txBody>
+      </p:sp>
       <p:sp>
         <p:nvSpPr>
           <p:cNvPr id="2" name="Title 1"/>
@@ -3329,8 +3423,8 @@
         </p:nvSpPr>
         <p:spPr>
           <a:xfrm>
-            <a:off x="853418" y="2057400"/>
-            <a:ext cx="6095847" cy="1554480"/>
+            <a:off x="822960" y="2606040"/>
+            <a:ext cx="5608179" cy="1188720"/>
           </a:xfrm>
         </p:spPr>
         <p:txBody>
@@ -3347,7 +3441,7 @@
             <a:r>
               <a:rPr sz="3600" b="1" i="0">
                 <a:solidFill>
-                  <a:srgbClr val="115F59"/>
+                  <a:srgbClr val="26231F"/>
                 </a:solidFill>
               </a:rPr>
               <a:t>저희 결혼합니다</a:t>
@@ -3357,14 +3451,14 @@
       </p:sp>
       <p:sp>
         <p:nvSpPr>
-          <p:cNvPr id="4" name="한 줄 문구"/>
+          <p:cNvPr id="6" name="한 줄 문구"/>
           <p:cNvSpPr txBox="1"/>
           <p:nvPr/>
         </p:nvSpPr>
         <p:spPr>
           <a:xfrm>
-            <a:off x="853418" y="3749039"/>
-            <a:ext cx="6095847" cy="822960"/>
+            <a:off x="822960" y="3886200"/>
+            <a:ext cx="5608179" cy="822960"/>
           </a:xfrm>
           <a:prstGeom prst="rect">
             <a:avLst/>
@@ -3383,9 +3477,9 @@
               </a:lnSpc>
             </a:pPr>
             <a:r>
-              <a:rPr sz="1700" b="0" i="1">
-                <a:solidFill>
-                  <a:srgbClr val="115F59"/>
+              <a:rPr sz="1700" b="0" i="0">
+                <a:solidFill>
+                  <a:srgbClr val="26231F"/>
                 </a:solidFill>
               </a:rPr>
               <a:t>부모님께 먼저 말씀드리고 날을 잡았습니다</a:t>
@@ -3395,14 +3489,14 @@
       </p:sp>
       <p:sp>
         <p:nvSpPr>
-          <p:cNvPr id="5" name="안내 문구"/>
+          <p:cNvPr id="7" name="안내 문구"/>
           <p:cNvSpPr txBox="1"/>
           <p:nvPr/>
         </p:nvSpPr>
         <p:spPr>
           <a:xfrm>
-            <a:off x="853418" y="4617720"/>
-            <a:ext cx="6095847" cy="914400"/>
+            <a:off x="822960" y="4754880"/>
+            <a:ext cx="5608179" cy="914400"/>
           </a:xfrm>
           <a:prstGeom prst="rect">
             <a:avLst/>
@@ -3423,7 +3517,7 @@
             <a:r>
               <a:rPr sz="1400" b="0" i="0">
                 <a:solidFill>
-                  <a:srgbClr val="666666"/>
+                  <a:srgbClr val="26231F"/>
                 </a:solidFill>
               </a:rPr>
               <a:t>신랑 이름 ♥ 신부 이름</a:t>
@@ -3438,10 +3532,10 @@
             <a:r>
               <a:rPr sz="1400" b="0" i="0">
                 <a:solidFill>
-                  <a:srgbClr val="666666"/>
+                  <a:srgbClr val="26231F"/>
                 </a:solidFill>
               </a:rPr>
-              <a:t>2027. 00. 00 · 예식장 이름</a:t>
+              <a:t>날짜 입력 · 예식장 이름</a:t>
             </a:r>
           </a:p>
         </p:txBody>
@@ -3460,7 +3554,7 @@
     <p:bg>
       <p:bgPr>
         <a:solidFill>
-          <a:srgbClr val="EEFCFB"/>
+          <a:srgbClr val="EAFDF2"/>
         </a:solidFill>
         <a:effectLst/>
       </p:bgPr>
@@ -3474,77 +3568,77 @@
       <p:grpSpPr/>
       <p:sp>
         <p:nvSpPr>
-          <p:cNvPr id="3" name="장식"/>
+          <p:cNvPr id="3" name="포인트"/>
           <p:cNvSpPr/>
           <p:nvPr/>
         </p:nvSpPr>
         <p:spPr>
           <a:xfrm>
-            <a:off x="256032" y="256032"/>
-            <a:ext cx="11679631" cy="6345936"/>
+            <a:off x="5958687" y="246888"/>
+            <a:ext cx="274320" cy="274320"/>
+          </a:xfrm>
+          <a:prstGeom prst="donut">
+            <a:avLst/>
+          </a:prstGeom>
+          <a:solidFill>
+            <a:srgbClr val="7BEAA9"/>
+          </a:solidFill>
+          <a:ln>
+            <a:noFill/>
+          </a:ln>
+        </p:spPr>
+        <p:txBody>
+          <a:bodyPr rtlCol="0" anchor="ctr"/>
+          <a:lstStyle/>
+          <a:p>
+            <a:pPr algn="ctr"/>
+          </a:p>
+        </p:txBody>
+      </p:sp>
+      <p:sp>
+        <p:nvSpPr>
+          <p:cNvPr id="4" name="장식"/>
+          <p:cNvSpPr/>
+          <p:nvPr/>
+        </p:nvSpPr>
+        <p:spPr>
+          <a:xfrm>
+            <a:off x="5684367" y="1572768"/>
+            <a:ext cx="822960" cy="22860"/>
+          </a:xfrm>
+          <a:prstGeom prst="rect">
+            <a:avLst/>
+          </a:prstGeom>
+          <a:solidFill>
+            <a:srgbClr val="7BEAA9"/>
+          </a:solidFill>
+          <a:ln>
+            <a:noFill/>
+          </a:ln>
+        </p:spPr>
+        <p:txBody>
+          <a:bodyPr rtlCol="0" anchor="ctr"/>
+          <a:lstStyle/>
+          <a:p>
+            <a:pPr algn="ctr"/>
+          </a:p>
+        </p:txBody>
+      </p:sp>
+      <p:sp>
+        <p:nvSpPr>
+          <p:cNvPr id="5" name="상단 라벨"/>
+          <p:cNvSpPr txBox="1"/>
+          <p:nvPr/>
+        </p:nvSpPr>
+        <p:spPr>
+          <a:xfrm>
+            <a:off x="640080" y="182880"/>
+            <a:ext cx="3657600" cy="274320"/>
           </a:xfrm>
           <a:prstGeom prst="rect">
             <a:avLst/>
           </a:prstGeom>
           <a:noFill/>
-          <a:ln w="28575">
-            <a:solidFill>
-              <a:srgbClr val="26C5B8"/>
-            </a:solidFill>
-          </a:ln>
-        </p:spPr>
-        <p:txBody>
-          <a:bodyPr rtlCol="0" anchor="ctr"/>
-          <a:lstStyle/>
-          <a:p>
-            <a:pPr algn="ctr"/>
-          </a:p>
-        </p:txBody>
-      </p:sp>
-      <p:sp>
-        <p:nvSpPr>
-          <p:cNvPr id="4" name="장식"/>
-          <p:cNvSpPr/>
-          <p:nvPr/>
-        </p:nvSpPr>
-        <p:spPr>
-          <a:xfrm>
-            <a:off x="384048" y="384048"/>
-            <a:ext cx="11423599" cy="6089904"/>
-          </a:xfrm>
-          <a:prstGeom prst="rect">
-            <a:avLst/>
-          </a:prstGeom>
-          <a:noFill/>
-          <a:ln w="9525">
-            <a:solidFill>
-              <a:srgbClr val="D1FAF7"/>
-            </a:solidFill>
-          </a:ln>
-        </p:spPr>
-        <p:txBody>
-          <a:bodyPr rtlCol="0" anchor="ctr"/>
-          <a:lstStyle/>
-          <a:p>
-            <a:pPr algn="ctr"/>
-          </a:p>
-        </p:txBody>
-      </p:sp>
-      <p:sp>
-        <p:nvSpPr>
-          <p:cNvPr id="2" name="Title 1"/>
-          <p:cNvSpPr>
-            <a:spLocks noGrp="1"/>
-          </p:cNvSpPr>
-          <p:nvPr>
-            <p:ph type="title"/>
-          </p:nvPr>
-        </p:nvSpPr>
-        <p:spPr>
-          <a:xfrm>
-            <a:off x="822960" y="548640"/>
-            <a:ext cx="9265615" cy="822960"/>
-          </a:xfrm>
         </p:spPr>
         <p:txBody>
           <a:bodyPr wrap="square" lIns="54864" rIns="54864" tIns="27432" bIns="27432" anchor="ctr">
@@ -3553,6 +3647,44 @@
           <a:lstStyle/>
           <a:p>
             <a:pPr algn="l">
+              <a:lnSpc>
+                <a:spcPct val="115000"/>
+              </a:lnSpc>
+            </a:pPr>
+            <a:r>
+              <a:rPr sz="800" b="1" i="0" spc="250">
+                <a:solidFill>
+                  <a:srgbClr val="8E8780"/>
+                </a:solidFill>
+              </a:rPr>
+              <a:t>WEDDING</a:t>
+            </a:r>
+          </a:p>
+        </p:txBody>
+      </p:sp>
+      <p:sp>
+        <p:nvSpPr>
+          <p:cNvPr id="2" name="Title 1"/>
+          <p:cNvSpPr>
+            <a:spLocks noGrp="1"/>
+          </p:cNvSpPr>
+          <p:nvPr>
+            <p:ph type="title"/>
+          </p:nvPr>
+        </p:nvSpPr>
+        <p:spPr>
+          <a:xfrm>
+            <a:off x="1371600" y="640080"/>
+            <a:ext cx="9448495" cy="868680"/>
+          </a:xfrm>
+        </p:spPr>
+        <p:txBody>
+          <a:bodyPr wrap="square" lIns="54864" rIns="54864" tIns="27432" bIns="27432" anchor="ctr">
+            <a:noAutofit/>
+          </a:bodyPr>
+          <a:lstStyle/>
+          <a:p>
+            <a:pPr algn="ctr">
               <a:lnSpc>
                 <a:spcPct val="105000"/>
               </a:lnSpc>
@@ -3560,7 +3692,7 @@
             <a:r>
               <a:rPr sz="3000" b="1" i="0">
                 <a:solidFill>
-                  <a:srgbClr val="115F59"/>
+                  <a:srgbClr val="26231F"/>
                 </a:solidFill>
               </a:rPr>
               <a:t>신랑 · 신부 소개</a:t>
@@ -3570,25 +3702,23 @@
       </p:sp>
       <p:sp>
         <p:nvSpPr>
-          <p:cNvPr id="5" name="사진 자리"/>
+          <p:cNvPr id="6" name="사진 자리"/>
           <p:cNvSpPr/>
           <p:nvPr/>
         </p:nvSpPr>
         <p:spPr>
           <a:xfrm>
-            <a:off x="2076373" y="1554480"/>
-            <a:ext cx="2308860" cy="2308860"/>
+            <a:off x="1996363" y="1783080"/>
+            <a:ext cx="2286000" cy="2286000"/>
           </a:xfrm>
           <a:prstGeom prst="ellipse">
             <a:avLst/>
           </a:prstGeom>
           <a:solidFill>
-            <a:srgbClr val="D1FAF7"/>
+            <a:srgbClr val="D1FAE2"/>
           </a:solidFill>
           <a:ln w="19050">
-            <a:solidFill>
-              <a:srgbClr val="26C5B8"/>
-            </a:solidFill>
+            <a:noFill/>
             <a:prstDash val="dash"/>
           </a:ln>
         </p:spPr>
@@ -3606,7 +3736,7 @@
             <a:r>
               <a:rPr sz="1200" b="0" i="0">
                 <a:solidFill>
-                  <a:srgbClr val="115F59"/>
+                  <a:srgbClr val="8E8780"/>
                 </a:solidFill>
               </a:rPr>
               <a:t>사진</a:t>
@@ -3616,14 +3746,14 @@
       </p:sp>
       <p:sp>
         <p:nvSpPr>
-          <p:cNvPr id="6" name="TextBox 5"/>
+          <p:cNvPr id="7" name="TextBox 6"/>
           <p:cNvSpPr txBox="1"/>
           <p:nvPr/>
         </p:nvSpPr>
         <p:spPr>
           <a:xfrm>
-            <a:off x="822960" y="3954779"/>
-            <a:ext cx="4815687" cy="411480"/>
+            <a:off x="640080" y="4160520"/>
+            <a:ext cx="4998567" cy="411480"/>
           </a:xfrm>
           <a:prstGeom prst="rect">
             <a:avLst/>
@@ -3644,7 +3774,7 @@
             <a:r>
               <a:rPr sz="1600" b="1" i="0">
                 <a:solidFill>
-                  <a:srgbClr val="115F59"/>
+                  <a:srgbClr val="274935"/>
                 </a:solidFill>
               </a:rPr>
               <a:t>신랑</a:t>
@@ -3654,14 +3784,14 @@
       </p:sp>
       <p:sp>
         <p:nvSpPr>
-          <p:cNvPr id="7" name="TextBox 6"/>
+          <p:cNvPr id="8" name="TextBox 7"/>
           <p:cNvSpPr txBox="1"/>
           <p:nvPr/>
         </p:nvSpPr>
         <p:spPr>
           <a:xfrm>
-            <a:off x="914400" y="4411979"/>
-            <a:ext cx="4632807" cy="1760219"/>
+            <a:off x="731519" y="4617720"/>
+            <a:ext cx="4815687" cy="1737360"/>
           </a:xfrm>
           <a:prstGeom prst="rect">
             <a:avLst/>
@@ -3722,25 +3852,23 @@
       </p:sp>
       <p:sp>
         <p:nvSpPr>
-          <p:cNvPr id="8" name="사진 자리"/>
+          <p:cNvPr id="9" name="사진 자리"/>
           <p:cNvSpPr/>
           <p:nvPr/>
         </p:nvSpPr>
         <p:spPr>
           <a:xfrm>
-            <a:off x="7806461" y="1554480"/>
-            <a:ext cx="2308860" cy="2308860"/>
+            <a:off x="7909331" y="1783080"/>
+            <a:ext cx="2286000" cy="2286000"/>
           </a:xfrm>
           <a:prstGeom prst="ellipse">
             <a:avLst/>
           </a:prstGeom>
           <a:solidFill>
-            <a:srgbClr val="D1FAF7"/>
+            <a:srgbClr val="D1FAE2"/>
           </a:solidFill>
           <a:ln w="19050">
-            <a:solidFill>
-              <a:srgbClr val="26C5B8"/>
-            </a:solidFill>
+            <a:noFill/>
             <a:prstDash val="dash"/>
           </a:ln>
         </p:spPr>
@@ -3758,7 +3886,7 @@
             <a:r>
               <a:rPr sz="1200" b="0" i="0">
                 <a:solidFill>
-                  <a:srgbClr val="115F59"/>
+                  <a:srgbClr val="8E8780"/>
                 </a:solidFill>
               </a:rPr>
               <a:t>사진</a:t>
@@ -3768,14 +3896,14 @@
       </p:sp>
       <p:sp>
         <p:nvSpPr>
-          <p:cNvPr id="9" name="TextBox 8"/>
+          <p:cNvPr id="10" name="TextBox 9"/>
           <p:cNvSpPr txBox="1"/>
           <p:nvPr/>
         </p:nvSpPr>
         <p:spPr>
           <a:xfrm>
-            <a:off x="6553047" y="3954779"/>
-            <a:ext cx="4815687" cy="411480"/>
+            <a:off x="6553047" y="4160520"/>
+            <a:ext cx="4998567" cy="411480"/>
           </a:xfrm>
           <a:prstGeom prst="rect">
             <a:avLst/>
@@ -3796,7 +3924,7 @@
             <a:r>
               <a:rPr sz="1600" b="1" i="0">
                 <a:solidFill>
-                  <a:srgbClr val="115F59"/>
+                  <a:srgbClr val="274935"/>
                 </a:solidFill>
               </a:rPr>
               <a:t>신부</a:t>
@@ -3806,14 +3934,14 @@
       </p:sp>
       <p:sp>
         <p:nvSpPr>
-          <p:cNvPr id="10" name="TextBox 9"/>
+          <p:cNvPr id="11" name="TextBox 10"/>
           <p:cNvSpPr txBox="1"/>
           <p:nvPr/>
         </p:nvSpPr>
         <p:spPr>
           <a:xfrm>
-            <a:off x="6644487" y="4411979"/>
-            <a:ext cx="4632807" cy="1760219"/>
+            <a:off x="6644487" y="4617720"/>
+            <a:ext cx="4815687" cy="1737360"/>
           </a:xfrm>
           <a:prstGeom prst="rect">
             <a:avLst/>
@@ -3886,7 +4014,7 @@
     <p:bg>
       <p:bgPr>
         <a:solidFill>
-          <a:srgbClr val="EEFCFB"/>
+          <a:srgbClr val="EAFDF2"/>
         </a:solidFill>
         <a:effectLst/>
       </p:bgPr>
@@ -3900,77 +4028,77 @@
       <p:grpSpPr/>
       <p:sp>
         <p:nvSpPr>
-          <p:cNvPr id="3" name="장식"/>
+          <p:cNvPr id="3" name="포인트"/>
           <p:cNvSpPr/>
           <p:nvPr/>
         </p:nvSpPr>
         <p:spPr>
           <a:xfrm>
-            <a:off x="256032" y="256032"/>
-            <a:ext cx="11679631" cy="6345936"/>
+            <a:off x="5958687" y="246888"/>
+            <a:ext cx="274320" cy="274320"/>
+          </a:xfrm>
+          <a:prstGeom prst="donut">
+            <a:avLst/>
+          </a:prstGeom>
+          <a:solidFill>
+            <a:srgbClr val="7BEAA9"/>
+          </a:solidFill>
+          <a:ln>
+            <a:noFill/>
+          </a:ln>
+        </p:spPr>
+        <p:txBody>
+          <a:bodyPr rtlCol="0" anchor="ctr"/>
+          <a:lstStyle/>
+          <a:p>
+            <a:pPr algn="ctr"/>
+          </a:p>
+        </p:txBody>
+      </p:sp>
+      <p:sp>
+        <p:nvSpPr>
+          <p:cNvPr id="4" name="장식"/>
+          <p:cNvSpPr/>
+          <p:nvPr/>
+        </p:nvSpPr>
+        <p:spPr>
+          <a:xfrm>
+            <a:off x="5684367" y="1572768"/>
+            <a:ext cx="822960" cy="22860"/>
+          </a:xfrm>
+          <a:prstGeom prst="rect">
+            <a:avLst/>
+          </a:prstGeom>
+          <a:solidFill>
+            <a:srgbClr val="7BEAA9"/>
+          </a:solidFill>
+          <a:ln>
+            <a:noFill/>
+          </a:ln>
+        </p:spPr>
+        <p:txBody>
+          <a:bodyPr rtlCol="0" anchor="ctr"/>
+          <a:lstStyle/>
+          <a:p>
+            <a:pPr algn="ctr"/>
+          </a:p>
+        </p:txBody>
+      </p:sp>
+      <p:sp>
+        <p:nvSpPr>
+          <p:cNvPr id="5" name="상단 라벨"/>
+          <p:cNvSpPr txBox="1"/>
+          <p:nvPr/>
+        </p:nvSpPr>
+        <p:spPr>
+          <a:xfrm>
+            <a:off x="640080" y="182880"/>
+            <a:ext cx="3657600" cy="274320"/>
           </a:xfrm>
           <a:prstGeom prst="rect">
             <a:avLst/>
           </a:prstGeom>
           <a:noFill/>
-          <a:ln w="28575">
-            <a:solidFill>
-              <a:srgbClr val="26C5B8"/>
-            </a:solidFill>
-          </a:ln>
-        </p:spPr>
-        <p:txBody>
-          <a:bodyPr rtlCol="0" anchor="ctr"/>
-          <a:lstStyle/>
-          <a:p>
-            <a:pPr algn="ctr"/>
-          </a:p>
-        </p:txBody>
-      </p:sp>
-      <p:sp>
-        <p:nvSpPr>
-          <p:cNvPr id="4" name="장식"/>
-          <p:cNvSpPr/>
-          <p:nvPr/>
-        </p:nvSpPr>
-        <p:spPr>
-          <a:xfrm>
-            <a:off x="384048" y="384048"/>
-            <a:ext cx="11423599" cy="6089904"/>
-          </a:xfrm>
-          <a:prstGeom prst="rect">
-            <a:avLst/>
-          </a:prstGeom>
-          <a:noFill/>
-          <a:ln w="9525">
-            <a:solidFill>
-              <a:srgbClr val="D1FAF7"/>
-            </a:solidFill>
-          </a:ln>
-        </p:spPr>
-        <p:txBody>
-          <a:bodyPr rtlCol="0" anchor="ctr"/>
-          <a:lstStyle/>
-          <a:p>
-            <a:pPr algn="ctr"/>
-          </a:p>
-        </p:txBody>
-      </p:sp>
-      <p:sp>
-        <p:nvSpPr>
-          <p:cNvPr id="2" name="Title 1"/>
-          <p:cNvSpPr>
-            <a:spLocks noGrp="1"/>
-          </p:cNvSpPr>
-          <p:nvPr>
-            <p:ph type="title"/>
-          </p:nvPr>
-        </p:nvSpPr>
-        <p:spPr>
-          <a:xfrm>
-            <a:off x="822960" y="548640"/>
-            <a:ext cx="9265615" cy="822960"/>
-          </a:xfrm>
         </p:spPr>
         <p:txBody>
           <a:bodyPr wrap="square" lIns="54864" rIns="54864" tIns="27432" bIns="27432" anchor="ctr">
@@ -3979,6 +4107,44 @@
           <a:lstStyle/>
           <a:p>
             <a:pPr algn="l">
+              <a:lnSpc>
+                <a:spcPct val="115000"/>
+              </a:lnSpc>
+            </a:pPr>
+            <a:r>
+              <a:rPr sz="800" b="1" i="0" spc="250">
+                <a:solidFill>
+                  <a:srgbClr val="8E8780"/>
+                </a:solidFill>
+              </a:rPr>
+              <a:t>WEDDING</a:t>
+            </a:r>
+          </a:p>
+        </p:txBody>
+      </p:sp>
+      <p:sp>
+        <p:nvSpPr>
+          <p:cNvPr id="2" name="Title 1"/>
+          <p:cNvSpPr>
+            <a:spLocks noGrp="1"/>
+          </p:cNvSpPr>
+          <p:nvPr>
+            <p:ph type="title"/>
+          </p:nvPr>
+        </p:nvSpPr>
+        <p:spPr>
+          <a:xfrm>
+            <a:off x="1371600" y="640080"/>
+            <a:ext cx="9448495" cy="868680"/>
+          </a:xfrm>
+        </p:spPr>
+        <p:txBody>
+          <a:bodyPr wrap="square" lIns="54864" rIns="54864" tIns="27432" bIns="27432" anchor="ctr">
+            <a:noAutofit/>
+          </a:bodyPr>
+          <a:lstStyle/>
+          <a:p>
+            <a:pPr algn="ctr">
               <a:lnSpc>
                 <a:spcPct val="105000"/>
               </a:lnSpc>
@@ -3986,7 +4152,7 @@
             <a:r>
               <a:rPr sz="3000" b="1" i="0">
                 <a:solidFill>
-                  <a:srgbClr val="115F59"/>
+                  <a:srgbClr val="26231F"/>
                 </a:solidFill>
               </a:rPr>
               <a:t>우리 두 사람</a:t>
@@ -3996,26 +4162,26 @@
       </p:sp>
       <p:sp>
         <p:nvSpPr>
-          <p:cNvPr id="5" name="왼쪽 칸"/>
+          <p:cNvPr id="6" name="왼쪽 칸"/>
           <p:cNvSpPr/>
           <p:nvPr/>
         </p:nvSpPr>
         <p:spPr>
           <a:xfrm>
-            <a:off x="822960" y="1554480"/>
-            <a:ext cx="5090007" cy="4617720"/>
+            <a:off x="640080" y="1783080"/>
+            <a:ext cx="5272887" cy="4572000"/>
           </a:xfrm>
           <a:prstGeom prst="roundRect">
             <a:avLst>
-              <a:gd name="adj" fmla="val 8000"/>
+              <a:gd name="adj" fmla="val 7000"/>
             </a:avLst>
           </a:prstGeom>
           <a:solidFill>
-            <a:srgbClr val="EEFCFB"/>
+            <a:srgbClr val="FFFFFF"/>
           </a:solidFill>
           <a:ln w="12700">
             <a:solidFill>
-              <a:srgbClr val="D1FAF7"/>
+              <a:srgbClr val="A5F3C5"/>
             </a:solidFill>
           </a:ln>
         </p:spPr>
@@ -4029,14 +4195,14 @@
       </p:sp>
       <p:sp>
         <p:nvSpPr>
-          <p:cNvPr id="6" name="칸 제목 바"/>
+          <p:cNvPr id="7" name="칸 제목 바"/>
           <p:cNvSpPr/>
           <p:nvPr/>
         </p:nvSpPr>
         <p:spPr>
           <a:xfrm>
-            <a:off x="822960" y="1554480"/>
-            <a:ext cx="5090007" cy="640080"/>
+            <a:off x="640080" y="1783080"/>
+            <a:ext cx="5272887" cy="640080"/>
           </a:xfrm>
           <a:prstGeom prst="roundRect">
             <a:avLst>
@@ -4044,7 +4210,7 @@
             </a:avLst>
           </a:prstGeom>
           <a:solidFill>
-            <a:srgbClr val="26C5B8"/>
+            <a:srgbClr val="7BEAA9"/>
           </a:solidFill>
           <a:ln>
             <a:noFill/>
@@ -4060,14 +4226,14 @@
       </p:sp>
       <p:sp>
         <p:nvSpPr>
-          <p:cNvPr id="7" name="TextBox 6"/>
+          <p:cNvPr id="8" name="TextBox 7"/>
           <p:cNvSpPr txBox="1"/>
           <p:nvPr/>
         </p:nvSpPr>
         <p:spPr>
           <a:xfrm>
-            <a:off x="1005840" y="1554480"/>
-            <a:ext cx="4724247" cy="640080"/>
+            <a:off x="822959" y="1783080"/>
+            <a:ext cx="4907127" cy="640080"/>
           </a:xfrm>
           <a:prstGeom prst="rect">
             <a:avLst/>
@@ -4088,7 +4254,7 @@
             <a:r>
               <a:rPr sz="1800" b="1" i="0">
                 <a:solidFill>
-                  <a:srgbClr val="FFFFFF"/>
+                  <a:srgbClr val="26231F"/>
                 </a:solidFill>
               </a:rPr>
               <a:t>닮은 점</a:t>
@@ -4098,14 +4264,14 @@
       </p:sp>
       <p:sp>
         <p:nvSpPr>
-          <p:cNvPr id="8" name="TextBox 7"/>
+          <p:cNvPr id="9" name="TextBox 8"/>
           <p:cNvSpPr txBox="1"/>
           <p:nvPr/>
         </p:nvSpPr>
         <p:spPr>
           <a:xfrm>
-            <a:off x="1051560" y="2377440"/>
-            <a:ext cx="4632807" cy="3703320"/>
+            <a:off x="868680" y="2606040"/>
+            <a:ext cx="4815687" cy="3657600"/>
           </a:xfrm>
           <a:prstGeom prst="rect">
             <a:avLst/>
@@ -4131,7 +4297,7 @@
             <a:r>
               <a:rPr sz="1500" b="0" i="0">
                 <a:solidFill>
-                  <a:srgbClr val="2B2B2B"/>
+                  <a:srgbClr val="26231F"/>
                 </a:solidFill>
               </a:rPr>
               <a:t>내용을 입력하세요</a:t>
@@ -4151,7 +4317,7 @@
             <a:r>
               <a:rPr sz="1500" b="0" i="0">
                 <a:solidFill>
-                  <a:srgbClr val="2B2B2B"/>
+                  <a:srgbClr val="26231F"/>
                 </a:solidFill>
               </a:rPr>
               <a:t>내용을 입력하세요</a:t>
@@ -4171,7 +4337,7 @@
             <a:r>
               <a:rPr sz="1500" b="0" i="0">
                 <a:solidFill>
-                  <a:srgbClr val="2B2B2B"/>
+                  <a:srgbClr val="26231F"/>
                 </a:solidFill>
               </a:rPr>
               <a:t>내용을 입력하세요</a:t>
@@ -4181,26 +4347,26 @@
       </p:sp>
       <p:sp>
         <p:nvSpPr>
-          <p:cNvPr id="9" name="오른쪽 칸"/>
+          <p:cNvPr id="10" name="오른쪽 칸"/>
           <p:cNvSpPr/>
           <p:nvPr/>
         </p:nvSpPr>
         <p:spPr>
           <a:xfrm>
-            <a:off x="6278727" y="1554480"/>
-            <a:ext cx="5090007" cy="4617720"/>
+            <a:off x="6278727" y="1783080"/>
+            <a:ext cx="5272887" cy="4572000"/>
           </a:xfrm>
           <a:prstGeom prst="roundRect">
             <a:avLst>
-              <a:gd name="adj" fmla="val 8000"/>
+              <a:gd name="adj" fmla="val 7000"/>
             </a:avLst>
           </a:prstGeom>
           <a:solidFill>
-            <a:srgbClr val="D1FAF7"/>
+            <a:srgbClr val="FFFFFF"/>
           </a:solidFill>
           <a:ln w="12700">
             <a:solidFill>
-              <a:srgbClr val="D1FAF7"/>
+              <a:srgbClr val="A5F3C5"/>
             </a:solidFill>
           </a:ln>
         </p:spPr>
@@ -4214,14 +4380,14 @@
       </p:sp>
       <p:sp>
         <p:nvSpPr>
-          <p:cNvPr id="10" name="칸 제목 바"/>
+          <p:cNvPr id="11" name="칸 제목 바"/>
           <p:cNvSpPr/>
           <p:nvPr/>
         </p:nvSpPr>
         <p:spPr>
           <a:xfrm>
-            <a:off x="6278727" y="1554480"/>
-            <a:ext cx="5090007" cy="640080"/>
+            <a:off x="6278727" y="1783080"/>
+            <a:ext cx="5272887" cy="640080"/>
           </a:xfrm>
           <a:prstGeom prst="roundRect">
             <a:avLst>
@@ -4229,7 +4395,7 @@
             </a:avLst>
           </a:prstGeom>
           <a:solidFill>
-            <a:srgbClr val="115F59"/>
+            <a:srgbClr val="274935"/>
           </a:solidFill>
           <a:ln>
             <a:noFill/>
@@ -4245,14 +4411,14 @@
       </p:sp>
       <p:sp>
         <p:nvSpPr>
-          <p:cNvPr id="11" name="TextBox 10"/>
+          <p:cNvPr id="12" name="TextBox 11"/>
           <p:cNvSpPr txBox="1"/>
           <p:nvPr/>
         </p:nvSpPr>
         <p:spPr>
           <a:xfrm>
-            <a:off x="6461607" y="1554480"/>
-            <a:ext cx="4724247" cy="640080"/>
+            <a:off x="6461607" y="1783080"/>
+            <a:ext cx="4907127" cy="640080"/>
           </a:xfrm>
           <a:prstGeom prst="rect">
             <a:avLst/>
@@ -4283,14 +4449,14 @@
       </p:sp>
       <p:sp>
         <p:nvSpPr>
-          <p:cNvPr id="12" name="TextBox 11"/>
+          <p:cNvPr id="13" name="TextBox 12"/>
           <p:cNvSpPr txBox="1"/>
           <p:nvPr/>
         </p:nvSpPr>
         <p:spPr>
           <a:xfrm>
-            <a:off x="6507327" y="2377440"/>
-            <a:ext cx="4632807" cy="3703320"/>
+            <a:off x="6507327" y="2606040"/>
+            <a:ext cx="4815687" cy="3657600"/>
           </a:xfrm>
           <a:prstGeom prst="rect">
             <a:avLst/>
@@ -4316,7 +4482,7 @@
             <a:r>
               <a:rPr sz="1500" b="0" i="0">
                 <a:solidFill>
-                  <a:srgbClr val="2B2B2B"/>
+                  <a:srgbClr val="26231F"/>
                 </a:solidFill>
               </a:rPr>
               <a:t>내용을 입력하세요</a:t>
@@ -4336,7 +4502,7 @@
             <a:r>
               <a:rPr sz="1500" b="0" i="0">
                 <a:solidFill>
-                  <a:srgbClr val="2B2B2B"/>
+                  <a:srgbClr val="26231F"/>
                 </a:solidFill>
               </a:rPr>
               <a:t>내용을 입력하세요</a:t>
@@ -4356,7 +4522,7 @@
             <a:r>
               <a:rPr sz="1500" b="0" i="0">
                 <a:solidFill>
-                  <a:srgbClr val="2B2B2B"/>
+                  <a:srgbClr val="26231F"/>
                 </a:solidFill>
               </a:rPr>
               <a:t>내용을 입력하세요</a:t>
@@ -4378,7 +4544,7 @@
     <p:bg>
       <p:bgPr>
         <a:solidFill>
-          <a:srgbClr val="EEFCFB"/>
+          <a:srgbClr val="EAFDF2"/>
         </a:solidFill>
         <a:effectLst/>
       </p:bgPr>
@@ -4392,77 +4558,77 @@
       <p:grpSpPr/>
       <p:sp>
         <p:nvSpPr>
-          <p:cNvPr id="3" name="장식"/>
+          <p:cNvPr id="3" name="포인트"/>
           <p:cNvSpPr/>
           <p:nvPr/>
         </p:nvSpPr>
         <p:spPr>
           <a:xfrm>
-            <a:off x="256032" y="256032"/>
-            <a:ext cx="11679631" cy="6345936"/>
+            <a:off x="5958687" y="246888"/>
+            <a:ext cx="274320" cy="274320"/>
+          </a:xfrm>
+          <a:prstGeom prst="donut">
+            <a:avLst/>
+          </a:prstGeom>
+          <a:solidFill>
+            <a:srgbClr val="7BEAA9"/>
+          </a:solidFill>
+          <a:ln>
+            <a:noFill/>
+          </a:ln>
+        </p:spPr>
+        <p:txBody>
+          <a:bodyPr rtlCol="0" anchor="ctr"/>
+          <a:lstStyle/>
+          <a:p>
+            <a:pPr algn="ctr"/>
+          </a:p>
+        </p:txBody>
+      </p:sp>
+      <p:sp>
+        <p:nvSpPr>
+          <p:cNvPr id="4" name="장식"/>
+          <p:cNvSpPr/>
+          <p:nvPr/>
+        </p:nvSpPr>
+        <p:spPr>
+          <a:xfrm>
+            <a:off x="5684367" y="1572768"/>
+            <a:ext cx="822960" cy="22860"/>
+          </a:xfrm>
+          <a:prstGeom prst="rect">
+            <a:avLst/>
+          </a:prstGeom>
+          <a:solidFill>
+            <a:srgbClr val="7BEAA9"/>
+          </a:solidFill>
+          <a:ln>
+            <a:noFill/>
+          </a:ln>
+        </p:spPr>
+        <p:txBody>
+          <a:bodyPr rtlCol="0" anchor="ctr"/>
+          <a:lstStyle/>
+          <a:p>
+            <a:pPr algn="ctr"/>
+          </a:p>
+        </p:txBody>
+      </p:sp>
+      <p:sp>
+        <p:nvSpPr>
+          <p:cNvPr id="5" name="상단 라벨"/>
+          <p:cNvSpPr txBox="1"/>
+          <p:nvPr/>
+        </p:nvSpPr>
+        <p:spPr>
+          <a:xfrm>
+            <a:off x="640080" y="182880"/>
+            <a:ext cx="3657600" cy="274320"/>
           </a:xfrm>
           <a:prstGeom prst="rect">
             <a:avLst/>
           </a:prstGeom>
           <a:noFill/>
-          <a:ln w="28575">
-            <a:solidFill>
-              <a:srgbClr val="26C5B8"/>
-            </a:solidFill>
-          </a:ln>
-        </p:spPr>
-        <p:txBody>
-          <a:bodyPr rtlCol="0" anchor="ctr"/>
-          <a:lstStyle/>
-          <a:p>
-            <a:pPr algn="ctr"/>
-          </a:p>
-        </p:txBody>
-      </p:sp>
-      <p:sp>
-        <p:nvSpPr>
-          <p:cNvPr id="4" name="장식"/>
-          <p:cNvSpPr/>
-          <p:nvPr/>
-        </p:nvSpPr>
-        <p:spPr>
-          <a:xfrm>
-            <a:off x="384048" y="384048"/>
-            <a:ext cx="11423599" cy="6089904"/>
-          </a:xfrm>
-          <a:prstGeom prst="rect">
-            <a:avLst/>
-          </a:prstGeom>
-          <a:noFill/>
-          <a:ln w="9525">
-            <a:solidFill>
-              <a:srgbClr val="D1FAF7"/>
-            </a:solidFill>
-          </a:ln>
-        </p:spPr>
-        <p:txBody>
-          <a:bodyPr rtlCol="0" anchor="ctr"/>
-          <a:lstStyle/>
-          <a:p>
-            <a:pPr algn="ctr"/>
-          </a:p>
-        </p:txBody>
-      </p:sp>
-      <p:sp>
-        <p:nvSpPr>
-          <p:cNvPr id="2" name="Title 1"/>
-          <p:cNvSpPr>
-            <a:spLocks noGrp="1"/>
-          </p:cNvSpPr>
-          <p:nvPr>
-            <p:ph type="title"/>
-          </p:nvPr>
-        </p:nvSpPr>
-        <p:spPr>
-          <a:xfrm>
-            <a:off x="822960" y="548640"/>
-            <a:ext cx="9265615" cy="822960"/>
-          </a:xfrm>
         </p:spPr>
         <p:txBody>
           <a:bodyPr wrap="square" lIns="54864" rIns="54864" tIns="27432" bIns="27432" anchor="ctr">
@@ -4471,6 +4637,44 @@
           <a:lstStyle/>
           <a:p>
             <a:pPr algn="l">
+              <a:lnSpc>
+                <a:spcPct val="115000"/>
+              </a:lnSpc>
+            </a:pPr>
+            <a:r>
+              <a:rPr sz="800" b="1" i="0" spc="250">
+                <a:solidFill>
+                  <a:srgbClr val="8E8780"/>
+                </a:solidFill>
+              </a:rPr>
+              <a:t>WEDDING</a:t>
+            </a:r>
+          </a:p>
+        </p:txBody>
+      </p:sp>
+      <p:sp>
+        <p:nvSpPr>
+          <p:cNvPr id="2" name="Title 1"/>
+          <p:cNvSpPr>
+            <a:spLocks noGrp="1"/>
+          </p:cNvSpPr>
+          <p:nvPr>
+            <p:ph type="title"/>
+          </p:nvPr>
+        </p:nvSpPr>
+        <p:spPr>
+          <a:xfrm>
+            <a:off x="1371600" y="640080"/>
+            <a:ext cx="9448495" cy="868680"/>
+          </a:xfrm>
+        </p:spPr>
+        <p:txBody>
+          <a:bodyPr wrap="square" lIns="54864" rIns="54864" tIns="27432" bIns="27432" anchor="ctr">
+            <a:noAutofit/>
+          </a:bodyPr>
+          <a:lstStyle/>
+          <a:p>
+            <a:pPr algn="ctr">
               <a:lnSpc>
                 <a:spcPct val="105000"/>
               </a:lnSpc>
@@ -4478,7 +4682,7 @@
             <a:r>
               <a:rPr sz="3000" b="1" i="0">
                 <a:solidFill>
-                  <a:srgbClr val="115F59"/>
+                  <a:srgbClr val="26231F"/>
                 </a:solidFill>
               </a:rPr>
               <a:t>서로에게 하고 싶은 말</a:t>
@@ -4488,26 +4692,26 @@
       </p:sp>
       <p:sp>
         <p:nvSpPr>
-          <p:cNvPr id="5" name="왼쪽 칸"/>
+          <p:cNvPr id="6" name="왼쪽 칸"/>
           <p:cNvSpPr/>
           <p:nvPr/>
         </p:nvSpPr>
         <p:spPr>
           <a:xfrm>
-            <a:off x="822960" y="1554480"/>
-            <a:ext cx="5090007" cy="4617720"/>
+            <a:off x="640080" y="1783080"/>
+            <a:ext cx="5272887" cy="4572000"/>
           </a:xfrm>
           <a:prstGeom prst="roundRect">
             <a:avLst>
-              <a:gd name="adj" fmla="val 8000"/>
+              <a:gd name="adj" fmla="val 7000"/>
             </a:avLst>
           </a:prstGeom>
           <a:solidFill>
-            <a:srgbClr val="EEFCFB"/>
+            <a:srgbClr val="FFFFFF"/>
           </a:solidFill>
           <a:ln w="12700">
             <a:solidFill>
-              <a:srgbClr val="D1FAF7"/>
+              <a:srgbClr val="A5F3C5"/>
             </a:solidFill>
           </a:ln>
         </p:spPr>
@@ -4521,14 +4725,14 @@
       </p:sp>
       <p:sp>
         <p:nvSpPr>
-          <p:cNvPr id="6" name="칸 제목 바"/>
+          <p:cNvPr id="7" name="칸 제목 바"/>
           <p:cNvSpPr/>
           <p:nvPr/>
         </p:nvSpPr>
         <p:spPr>
           <a:xfrm>
-            <a:off x="822960" y="1554480"/>
-            <a:ext cx="5090007" cy="640080"/>
+            <a:off x="640080" y="1783080"/>
+            <a:ext cx="5272887" cy="640080"/>
           </a:xfrm>
           <a:prstGeom prst="roundRect">
             <a:avLst>
@@ -4536,7 +4740,7 @@
             </a:avLst>
           </a:prstGeom>
           <a:solidFill>
-            <a:srgbClr val="26C5B8"/>
+            <a:srgbClr val="7BEAA9"/>
           </a:solidFill>
           <a:ln>
             <a:noFill/>
@@ -4552,14 +4756,14 @@
       </p:sp>
       <p:sp>
         <p:nvSpPr>
-          <p:cNvPr id="7" name="TextBox 6"/>
+          <p:cNvPr id="8" name="TextBox 7"/>
           <p:cNvSpPr txBox="1"/>
           <p:nvPr/>
         </p:nvSpPr>
         <p:spPr>
           <a:xfrm>
-            <a:off x="1005840" y="1554480"/>
-            <a:ext cx="4724247" cy="640080"/>
+            <a:off x="822959" y="1783080"/>
+            <a:ext cx="4907127" cy="640080"/>
           </a:xfrm>
           <a:prstGeom prst="rect">
             <a:avLst/>
@@ -4580,7 +4784,7 @@
             <a:r>
               <a:rPr sz="1800" b="1" i="0">
                 <a:solidFill>
-                  <a:srgbClr val="FFFFFF"/>
+                  <a:srgbClr val="26231F"/>
                 </a:solidFill>
               </a:rPr>
               <a:t>신랑이 신부에게</a:t>
@@ -4590,14 +4794,14 @@
       </p:sp>
       <p:sp>
         <p:nvSpPr>
-          <p:cNvPr id="8" name="TextBox 7"/>
+          <p:cNvPr id="9" name="TextBox 8"/>
           <p:cNvSpPr txBox="1"/>
           <p:nvPr/>
         </p:nvSpPr>
         <p:spPr>
           <a:xfrm>
-            <a:off x="1051560" y="2377440"/>
-            <a:ext cx="4632807" cy="3703320"/>
+            <a:off x="868680" y="2606040"/>
+            <a:ext cx="4815687" cy="3657600"/>
           </a:xfrm>
           <a:prstGeom prst="rect">
             <a:avLst/>
@@ -4623,7 +4827,7 @@
             <a:r>
               <a:rPr sz="1500" b="0" i="0">
                 <a:solidFill>
-                  <a:srgbClr val="2B2B2B"/>
+                  <a:srgbClr val="26231F"/>
                 </a:solidFill>
               </a:rPr>
               <a:t>하고 싶은 말을 적어 주세요</a:t>
@@ -4633,26 +4837,26 @@
       </p:sp>
       <p:sp>
         <p:nvSpPr>
-          <p:cNvPr id="9" name="오른쪽 칸"/>
+          <p:cNvPr id="10" name="오른쪽 칸"/>
           <p:cNvSpPr/>
           <p:nvPr/>
         </p:nvSpPr>
         <p:spPr>
           <a:xfrm>
-            <a:off x="6278727" y="1554480"/>
-            <a:ext cx="5090007" cy="4617720"/>
+            <a:off x="6278727" y="1783080"/>
+            <a:ext cx="5272887" cy="4572000"/>
           </a:xfrm>
           <a:prstGeom prst="roundRect">
             <a:avLst>
-              <a:gd name="adj" fmla="val 8000"/>
+              <a:gd name="adj" fmla="val 7000"/>
             </a:avLst>
           </a:prstGeom>
           <a:solidFill>
-            <a:srgbClr val="D1FAF7"/>
+            <a:srgbClr val="FFFFFF"/>
           </a:solidFill>
           <a:ln w="12700">
             <a:solidFill>
-              <a:srgbClr val="D1FAF7"/>
+              <a:srgbClr val="A5F3C5"/>
             </a:solidFill>
           </a:ln>
         </p:spPr>
@@ -4666,14 +4870,14 @@
       </p:sp>
       <p:sp>
         <p:nvSpPr>
-          <p:cNvPr id="10" name="칸 제목 바"/>
+          <p:cNvPr id="11" name="칸 제목 바"/>
           <p:cNvSpPr/>
           <p:nvPr/>
         </p:nvSpPr>
         <p:spPr>
           <a:xfrm>
-            <a:off x="6278727" y="1554480"/>
-            <a:ext cx="5090007" cy="640080"/>
+            <a:off x="6278727" y="1783080"/>
+            <a:ext cx="5272887" cy="640080"/>
           </a:xfrm>
           <a:prstGeom prst="roundRect">
             <a:avLst>
@@ -4681,7 +4885,7 @@
             </a:avLst>
           </a:prstGeom>
           <a:solidFill>
-            <a:srgbClr val="115F59"/>
+            <a:srgbClr val="274935"/>
           </a:solidFill>
           <a:ln>
             <a:noFill/>
@@ -4697,14 +4901,14 @@
       </p:sp>
       <p:sp>
         <p:nvSpPr>
-          <p:cNvPr id="11" name="TextBox 10"/>
+          <p:cNvPr id="12" name="TextBox 11"/>
           <p:cNvSpPr txBox="1"/>
           <p:nvPr/>
         </p:nvSpPr>
         <p:spPr>
           <a:xfrm>
-            <a:off x="6461607" y="1554480"/>
-            <a:ext cx="4724247" cy="640080"/>
+            <a:off x="6461607" y="1783080"/>
+            <a:ext cx="4907127" cy="640080"/>
           </a:xfrm>
           <a:prstGeom prst="rect">
             <a:avLst/>
@@ -4735,14 +4939,14 @@
       </p:sp>
       <p:sp>
         <p:nvSpPr>
-          <p:cNvPr id="12" name="TextBox 11"/>
+          <p:cNvPr id="13" name="TextBox 12"/>
           <p:cNvSpPr txBox="1"/>
           <p:nvPr/>
         </p:nvSpPr>
         <p:spPr>
           <a:xfrm>
-            <a:off x="6507327" y="2377440"/>
-            <a:ext cx="4632807" cy="3703320"/>
+            <a:off x="6507327" y="2606040"/>
+            <a:ext cx="4815687" cy="3657600"/>
           </a:xfrm>
           <a:prstGeom prst="rect">
             <a:avLst/>
@@ -4768,7 +4972,7 @@
             <a:r>
               <a:rPr sz="1500" b="0" i="0">
                 <a:solidFill>
-                  <a:srgbClr val="2B2B2B"/>
+                  <a:srgbClr val="26231F"/>
                 </a:solidFill>
               </a:rPr>
               <a:t>하고 싶은 말을 적어 주세요</a:t>
@@ -4790,7 +4994,7 @@
     <p:bg>
       <p:bgPr>
         <a:solidFill>
-          <a:srgbClr val="EEFCFB"/>
+          <a:srgbClr val="EAFDF2"/>
         </a:solidFill>
         <a:effectLst/>
       </p:bgPr>
@@ -4804,77 +5008,77 @@
       <p:grpSpPr/>
       <p:sp>
         <p:nvSpPr>
-          <p:cNvPr id="3" name="장식"/>
+          <p:cNvPr id="3" name="포인트"/>
           <p:cNvSpPr/>
           <p:nvPr/>
         </p:nvSpPr>
         <p:spPr>
           <a:xfrm>
-            <a:off x="256032" y="256032"/>
-            <a:ext cx="11679631" cy="6345936"/>
+            <a:off x="5958687" y="246888"/>
+            <a:ext cx="274320" cy="274320"/>
+          </a:xfrm>
+          <a:prstGeom prst="donut">
+            <a:avLst/>
+          </a:prstGeom>
+          <a:solidFill>
+            <a:srgbClr val="7BEAA9"/>
+          </a:solidFill>
+          <a:ln>
+            <a:noFill/>
+          </a:ln>
+        </p:spPr>
+        <p:txBody>
+          <a:bodyPr rtlCol="0" anchor="ctr"/>
+          <a:lstStyle/>
+          <a:p>
+            <a:pPr algn="ctr"/>
+          </a:p>
+        </p:txBody>
+      </p:sp>
+      <p:sp>
+        <p:nvSpPr>
+          <p:cNvPr id="4" name="장식"/>
+          <p:cNvSpPr/>
+          <p:nvPr/>
+        </p:nvSpPr>
+        <p:spPr>
+          <a:xfrm>
+            <a:off x="5684367" y="1572768"/>
+            <a:ext cx="822960" cy="22860"/>
+          </a:xfrm>
+          <a:prstGeom prst="rect">
+            <a:avLst/>
+          </a:prstGeom>
+          <a:solidFill>
+            <a:srgbClr val="7BEAA9"/>
+          </a:solidFill>
+          <a:ln>
+            <a:noFill/>
+          </a:ln>
+        </p:spPr>
+        <p:txBody>
+          <a:bodyPr rtlCol="0" anchor="ctr"/>
+          <a:lstStyle/>
+          <a:p>
+            <a:pPr algn="ctr"/>
+          </a:p>
+        </p:txBody>
+      </p:sp>
+      <p:sp>
+        <p:nvSpPr>
+          <p:cNvPr id="5" name="상단 라벨"/>
+          <p:cNvSpPr txBox="1"/>
+          <p:nvPr/>
+        </p:nvSpPr>
+        <p:spPr>
+          <a:xfrm>
+            <a:off x="640080" y="182880"/>
+            <a:ext cx="3657600" cy="274320"/>
           </a:xfrm>
           <a:prstGeom prst="rect">
             <a:avLst/>
           </a:prstGeom>
           <a:noFill/>
-          <a:ln w="28575">
-            <a:solidFill>
-              <a:srgbClr val="26C5B8"/>
-            </a:solidFill>
-          </a:ln>
-        </p:spPr>
-        <p:txBody>
-          <a:bodyPr rtlCol="0" anchor="ctr"/>
-          <a:lstStyle/>
-          <a:p>
-            <a:pPr algn="ctr"/>
-          </a:p>
-        </p:txBody>
-      </p:sp>
-      <p:sp>
-        <p:nvSpPr>
-          <p:cNvPr id="4" name="장식"/>
-          <p:cNvSpPr/>
-          <p:nvPr/>
-        </p:nvSpPr>
-        <p:spPr>
-          <a:xfrm>
-            <a:off x="384048" y="384048"/>
-            <a:ext cx="11423599" cy="6089904"/>
-          </a:xfrm>
-          <a:prstGeom prst="rect">
-            <a:avLst/>
-          </a:prstGeom>
-          <a:noFill/>
-          <a:ln w="9525">
-            <a:solidFill>
-              <a:srgbClr val="D1FAF7"/>
-            </a:solidFill>
-          </a:ln>
-        </p:spPr>
-        <p:txBody>
-          <a:bodyPr rtlCol="0" anchor="ctr"/>
-          <a:lstStyle/>
-          <a:p>
-            <a:pPr algn="ctr"/>
-          </a:p>
-        </p:txBody>
-      </p:sp>
-      <p:sp>
-        <p:nvSpPr>
-          <p:cNvPr id="2" name="Title 1"/>
-          <p:cNvSpPr>
-            <a:spLocks noGrp="1"/>
-          </p:cNvSpPr>
-          <p:nvPr>
-            <p:ph type="title"/>
-          </p:nvPr>
-        </p:nvSpPr>
-        <p:spPr>
-          <a:xfrm>
-            <a:off x="822960" y="548640"/>
-            <a:ext cx="9265615" cy="822960"/>
-          </a:xfrm>
         </p:spPr>
         <p:txBody>
           <a:bodyPr wrap="square" lIns="54864" rIns="54864" tIns="27432" bIns="27432" anchor="ctr">
@@ -4883,6 +5087,44 @@
           <a:lstStyle/>
           <a:p>
             <a:pPr algn="l">
+              <a:lnSpc>
+                <a:spcPct val="115000"/>
+              </a:lnSpc>
+            </a:pPr>
+            <a:r>
+              <a:rPr sz="800" b="1" i="0" spc="250">
+                <a:solidFill>
+                  <a:srgbClr val="8E8780"/>
+                </a:solidFill>
+              </a:rPr>
+              <a:t>WEDDING</a:t>
+            </a:r>
+          </a:p>
+        </p:txBody>
+      </p:sp>
+      <p:sp>
+        <p:nvSpPr>
+          <p:cNvPr id="2" name="Title 1"/>
+          <p:cNvSpPr>
+            <a:spLocks noGrp="1"/>
+          </p:cNvSpPr>
+          <p:nvPr>
+            <p:ph type="title"/>
+          </p:nvPr>
+        </p:nvSpPr>
+        <p:spPr>
+          <a:xfrm>
+            <a:off x="1371600" y="640080"/>
+            <a:ext cx="9448495" cy="868680"/>
+          </a:xfrm>
+        </p:spPr>
+        <p:txBody>
+          <a:bodyPr wrap="square" lIns="54864" rIns="54864" tIns="27432" bIns="27432" anchor="ctr">
+            <a:noAutofit/>
+          </a:bodyPr>
+          <a:lstStyle/>
+          <a:p>
+            <a:pPr algn="ctr">
               <a:lnSpc>
                 <a:spcPct val="105000"/>
               </a:lnSpc>
@@ -4890,7 +5132,7 @@
             <a:r>
               <a:rPr sz="3000" b="1" i="0">
                 <a:solidFill>
-                  <a:srgbClr val="115F59"/>
+                  <a:srgbClr val="26231F"/>
                 </a:solidFill>
               </a:rPr>
               <a:t>웨딩 사진</a:t>
@@ -4900,14 +5142,14 @@
       </p:sp>
       <p:sp>
         <p:nvSpPr>
-          <p:cNvPr id="5" name="사진 자리"/>
+          <p:cNvPr id="6" name="사진 자리"/>
           <p:cNvSpPr/>
           <p:nvPr/>
         </p:nvSpPr>
         <p:spPr>
           <a:xfrm>
-            <a:off x="822960" y="1554480"/>
-            <a:ext cx="3393338" cy="2217420"/>
+            <a:off x="640080" y="1783080"/>
+            <a:ext cx="3515258" cy="2194560"/>
           </a:xfrm>
           <a:prstGeom prst="roundRect">
             <a:avLst>
@@ -4915,12 +5157,10 @@
             </a:avLst>
           </a:prstGeom>
           <a:solidFill>
-            <a:srgbClr val="D1FAF7"/>
+            <a:srgbClr val="D1FAE2"/>
           </a:solidFill>
           <a:ln w="19050">
-            <a:solidFill>
-              <a:srgbClr val="26C5B8"/>
-            </a:solidFill>
+            <a:noFill/>
             <a:prstDash val="dash"/>
           </a:ln>
         </p:spPr>
@@ -4938,7 +5178,7 @@
             <a:r>
               <a:rPr sz="1200" b="0" i="0">
                 <a:solidFill>
-                  <a:srgbClr val="115F59"/>
+                  <a:srgbClr val="8E8780"/>
                 </a:solidFill>
               </a:rPr>
               <a:t>사진 1</a:t>
@@ -4948,14 +5188,14 @@
       </p:sp>
       <p:sp>
         <p:nvSpPr>
-          <p:cNvPr id="6" name="사진 자리"/>
+          <p:cNvPr id="7" name="사진 자리"/>
           <p:cNvSpPr/>
           <p:nvPr/>
         </p:nvSpPr>
         <p:spPr>
           <a:xfrm>
-            <a:off x="4399178" y="1554480"/>
-            <a:ext cx="3393338" cy="2217420"/>
+            <a:off x="4338218" y="1783080"/>
+            <a:ext cx="3515258" cy="2194560"/>
           </a:xfrm>
           <a:prstGeom prst="roundRect">
             <a:avLst>
@@ -4963,12 +5203,10 @@
             </a:avLst>
           </a:prstGeom>
           <a:solidFill>
-            <a:srgbClr val="D1FAF7"/>
+            <a:srgbClr val="D1FAE2"/>
           </a:solidFill>
           <a:ln w="19050">
-            <a:solidFill>
-              <a:srgbClr val="26C5B8"/>
-            </a:solidFill>
+            <a:noFill/>
             <a:prstDash val="dash"/>
           </a:ln>
         </p:spPr>
@@ -4986,7 +5224,7 @@
             <a:r>
               <a:rPr sz="1200" b="0" i="0">
                 <a:solidFill>
-                  <a:srgbClr val="115F59"/>
+                  <a:srgbClr val="8E8780"/>
                 </a:solidFill>
               </a:rPr>
               <a:t>사진 2</a:t>
@@ -4996,14 +5234,14 @@
       </p:sp>
       <p:sp>
         <p:nvSpPr>
-          <p:cNvPr id="7" name="사진 자리"/>
+          <p:cNvPr id="8" name="사진 자리"/>
           <p:cNvSpPr/>
           <p:nvPr/>
         </p:nvSpPr>
         <p:spPr>
           <a:xfrm>
-            <a:off x="7975396" y="1554480"/>
-            <a:ext cx="3393338" cy="2217420"/>
+            <a:off x="8036356" y="1783080"/>
+            <a:ext cx="3515258" cy="2194560"/>
           </a:xfrm>
           <a:prstGeom prst="roundRect">
             <a:avLst>
@@ -5011,12 +5249,10 @@
             </a:avLst>
           </a:prstGeom>
           <a:solidFill>
-            <a:srgbClr val="D1FAF7"/>
+            <a:srgbClr val="D1FAE2"/>
           </a:solidFill>
           <a:ln w="19050">
-            <a:solidFill>
-              <a:srgbClr val="26C5B8"/>
-            </a:solidFill>
+            <a:noFill/>
             <a:prstDash val="dash"/>
           </a:ln>
         </p:spPr>
@@ -5034,7 +5270,7 @@
             <a:r>
               <a:rPr sz="1200" b="0" i="0">
                 <a:solidFill>
-                  <a:srgbClr val="115F59"/>
+                  <a:srgbClr val="8E8780"/>
                 </a:solidFill>
               </a:rPr>
               <a:t>사진 3</a:t>
@@ -5044,14 +5280,14 @@
       </p:sp>
       <p:sp>
         <p:nvSpPr>
-          <p:cNvPr id="8" name="사진 자리"/>
+          <p:cNvPr id="9" name="사진 자리"/>
           <p:cNvSpPr/>
           <p:nvPr/>
         </p:nvSpPr>
         <p:spPr>
           <a:xfrm>
-            <a:off x="822960" y="3954780"/>
-            <a:ext cx="3393338" cy="2217420"/>
+            <a:off x="640080" y="4160520"/>
+            <a:ext cx="3515258" cy="2194560"/>
           </a:xfrm>
           <a:prstGeom prst="roundRect">
             <a:avLst>
@@ -5059,12 +5295,10 @@
             </a:avLst>
           </a:prstGeom>
           <a:solidFill>
-            <a:srgbClr val="D1FAF7"/>
+            <a:srgbClr val="D1FAE2"/>
           </a:solidFill>
           <a:ln w="19050">
-            <a:solidFill>
-              <a:srgbClr val="26C5B8"/>
-            </a:solidFill>
+            <a:noFill/>
             <a:prstDash val="dash"/>
           </a:ln>
         </p:spPr>
@@ -5082,7 +5316,7 @@
             <a:r>
               <a:rPr sz="1200" b="0" i="0">
                 <a:solidFill>
-                  <a:srgbClr val="115F59"/>
+                  <a:srgbClr val="8E8780"/>
                 </a:solidFill>
               </a:rPr>
               <a:t>사진 4</a:t>
@@ -5092,14 +5326,14 @@
       </p:sp>
       <p:sp>
         <p:nvSpPr>
-          <p:cNvPr id="9" name="사진 자리"/>
+          <p:cNvPr id="10" name="사진 자리"/>
           <p:cNvSpPr/>
           <p:nvPr/>
         </p:nvSpPr>
         <p:spPr>
           <a:xfrm>
-            <a:off x="4399178" y="3954780"/>
-            <a:ext cx="3393338" cy="2217420"/>
+            <a:off x="4338218" y="4160520"/>
+            <a:ext cx="3515258" cy="2194560"/>
           </a:xfrm>
           <a:prstGeom prst="roundRect">
             <a:avLst>
@@ -5107,12 +5341,10 @@
             </a:avLst>
           </a:prstGeom>
           <a:solidFill>
-            <a:srgbClr val="D1FAF7"/>
+            <a:srgbClr val="D1FAE2"/>
           </a:solidFill>
           <a:ln w="19050">
-            <a:solidFill>
-              <a:srgbClr val="26C5B8"/>
-            </a:solidFill>
+            <a:noFill/>
             <a:prstDash val="dash"/>
           </a:ln>
         </p:spPr>
@@ -5130,7 +5362,7 @@
             <a:r>
               <a:rPr sz="1200" b="0" i="0">
                 <a:solidFill>
-                  <a:srgbClr val="115F59"/>
+                  <a:srgbClr val="8E8780"/>
                 </a:solidFill>
               </a:rPr>
               <a:t>사진 5</a:t>
@@ -5140,14 +5372,14 @@
       </p:sp>
       <p:sp>
         <p:nvSpPr>
-          <p:cNvPr id="10" name="사진 자리"/>
+          <p:cNvPr id="11" name="사진 자리"/>
           <p:cNvSpPr/>
           <p:nvPr/>
         </p:nvSpPr>
         <p:spPr>
           <a:xfrm>
-            <a:off x="7975396" y="3954780"/>
-            <a:ext cx="3393338" cy="2217420"/>
+            <a:off x="8036356" y="4160520"/>
+            <a:ext cx="3515258" cy="2194560"/>
           </a:xfrm>
           <a:prstGeom prst="roundRect">
             <a:avLst>
@@ -5155,12 +5387,10 @@
             </a:avLst>
           </a:prstGeom>
           <a:solidFill>
-            <a:srgbClr val="D1FAF7"/>
+            <a:srgbClr val="D1FAE2"/>
           </a:solidFill>
           <a:ln w="19050">
-            <a:solidFill>
-              <a:srgbClr val="26C5B8"/>
-            </a:solidFill>
+            <a:noFill/>
             <a:prstDash val="dash"/>
           </a:ln>
         </p:spPr>
@@ -5178,7 +5408,7 @@
             <a:r>
               <a:rPr sz="1200" b="0" i="0">
                 <a:solidFill>
-                  <a:srgbClr val="115F59"/>
+                  <a:srgbClr val="8E8780"/>
                 </a:solidFill>
               </a:rPr>
               <a:t>사진 6</a:t>
@@ -5197,6 +5427,14 @@
 <file path=ppt/slides/slide6.xml><?xml version="1.0" encoding="utf-8"?>
 <p:sld xmlns:a="http://schemas.openxmlformats.org/drawingml/2006/main" xmlns:p="http://schemas.openxmlformats.org/presentationml/2006/main" xmlns:r="http://schemas.openxmlformats.org/officeDocument/2006/relationships">
   <p:cSld>
+    <p:bg>
+      <p:bgPr>
+        <a:solidFill>
+          <a:srgbClr val="EAFDF2"/>
+        </a:solidFill>
+        <a:effectLst/>
+      </p:bgPr>
+    </p:bg>
     <p:spTree>
       <p:nvGrpSpPr>
         <p:cNvPr id="1" name=""/>
@@ -5204,30 +5442,116 @@
         <p:nvPr/>
       </p:nvGrpSpPr>
       <p:grpSpPr/>
-      <p:pic>
-        <p:nvPicPr>
-          <p:cNvPr id="3" name="표지 그림" descr="wedding-16.jpg"/>
-          <p:cNvPicPr>
-            <a:picLocks noChangeAspect="1"/>
-          </p:cNvPicPr>
+      <p:sp>
+        <p:nvSpPr>
+          <p:cNvPr id="3" name="사진 자리"/>
+          <p:cNvSpPr/>
           <p:nvPr/>
-        </p:nvPicPr>
-        <p:blipFill>
-          <a:blip r:embed="rId2"/>
-          <a:stretch>
-            <a:fillRect/>
-          </a:stretch>
-        </p:blipFill>
-        <p:spPr>
-          <a:xfrm>
-            <a:off x="0" y="0"/>
-            <a:ext cx="12191695" cy="6858000"/>
+        </p:nvSpPr>
+        <p:spPr>
+          <a:xfrm>
+            <a:off x="7802684" y="0"/>
+            <a:ext cx="4389010" cy="6858000"/>
           </a:xfrm>
           <a:prstGeom prst="rect">
             <a:avLst/>
           </a:prstGeom>
-        </p:spPr>
-      </p:pic>
+          <a:solidFill>
+            <a:srgbClr val="A5F3C5"/>
+          </a:solidFill>
+          <a:ln>
+            <a:noFill/>
+          </a:ln>
+        </p:spPr>
+        <p:txBody>
+          <a:bodyPr rtlCol="0" anchor="ctr" wrap="square" lIns="54864" rIns="54864" tIns="27432" bIns="27432">
+            <a:noAutofit/>
+          </a:bodyPr>
+          <a:lstStyle/>
+          <a:p>
+            <a:pPr algn="ctr">
+              <a:lnSpc>
+                <a:spcPct val="100000"/>
+              </a:lnSpc>
+            </a:pPr>
+            <a:r>
+              <a:rPr sz="1400" b="0" i="0">
+                <a:solidFill>
+                  <a:srgbClr val="274935"/>
+                </a:solidFill>
+              </a:rPr>
+              <a:t>사진을 넣어 주세요</a:t>
+            </a:r>
+          </a:p>
+        </p:txBody>
+      </p:sp>
+      <p:sp>
+        <p:nvSpPr>
+          <p:cNvPr id="4" name="장식"/>
+          <p:cNvSpPr/>
+          <p:nvPr/>
+        </p:nvSpPr>
+        <p:spPr>
+          <a:xfrm>
+            <a:off x="8168435" y="365760"/>
+            <a:ext cx="3657508" cy="6126480"/>
+          </a:xfrm>
+          <a:prstGeom prst="rect">
+            <a:avLst/>
+          </a:prstGeom>
+          <a:noFill/>
+          <a:ln w="9525">
+            <a:solidFill>
+              <a:srgbClr val="26231F"/>
+            </a:solidFill>
+          </a:ln>
+        </p:spPr>
+        <p:txBody>
+          <a:bodyPr rtlCol="0" anchor="ctr"/>
+          <a:lstStyle/>
+          <a:p>
+            <a:pPr algn="ctr"/>
+          </a:p>
+        </p:txBody>
+      </p:sp>
+      <p:sp>
+        <p:nvSpPr>
+          <p:cNvPr id="5" name="라벨"/>
+          <p:cNvSpPr txBox="1"/>
+          <p:nvPr/>
+        </p:nvSpPr>
+        <p:spPr>
+          <a:xfrm>
+            <a:off x="822960" y="2148840"/>
+            <a:ext cx="5608179" cy="274320"/>
+          </a:xfrm>
+          <a:prstGeom prst="rect">
+            <a:avLst/>
+          </a:prstGeom>
+          <a:noFill/>
+        </p:spPr>
+        <p:txBody>
+          <a:bodyPr wrap="square" lIns="54864" rIns="54864" tIns="27432" bIns="27432" anchor="t">
+            <a:noAutofit/>
+          </a:bodyPr>
+          <a:lstStyle/>
+          <a:p>
+            <a:pPr algn="l">
+              <a:lnSpc>
+                <a:spcPct val="115000"/>
+              </a:lnSpc>
+            </a:pPr>
+            <a:r>
+              <a:rPr sz="1000" b="1" i="0" spc="250">
+                <a:solidFill>
+                  <a:srgbClr val="26231F"/>
+                </a:solidFill>
+              </a:rPr>
+              <a:t>WEDDING</a:t>
+            </a:r>
+          </a:p>
+        </p:txBody>
+      </p:sp>
       <p:sp>
         <p:nvSpPr>
           <p:cNvPr id="2" name="Title 1"/>
@@ -5240,8 +5564,8 @@
         </p:nvSpPr>
         <p:spPr>
           <a:xfrm>
-            <a:off x="853418" y="2057400"/>
-            <a:ext cx="6095847" cy="1554480"/>
+            <a:off x="822960" y="2606040"/>
+            <a:ext cx="5608179" cy="1188720"/>
           </a:xfrm>
         </p:spPr>
         <p:txBody>
@@ -5258,7 +5582,7 @@
             <a:r>
               <a:rPr sz="3400" b="1" i="0">
                 <a:solidFill>
-                  <a:srgbClr val="115F59"/>
+                  <a:srgbClr val="26231F"/>
                 </a:solidFill>
               </a:rPr>
               <a:t>와 주셔서 고맙습니다</a:t>
@@ -5268,14 +5592,14 @@
       </p:sp>
       <p:sp>
         <p:nvSpPr>
-          <p:cNvPr id="4" name="한 줄 문구"/>
+          <p:cNvPr id="6" name="한 줄 문구"/>
           <p:cNvSpPr txBox="1"/>
           <p:nvPr/>
         </p:nvSpPr>
         <p:spPr>
           <a:xfrm>
-            <a:off x="853418" y="3749039"/>
-            <a:ext cx="6095847" cy="822960"/>
+            <a:off x="822960" y="3886200"/>
+            <a:ext cx="5608179" cy="822960"/>
           </a:xfrm>
           <a:prstGeom prst="rect">
             <a:avLst/>
@@ -5294,9 +5618,9 @@
               </a:lnSpc>
             </a:pPr>
             <a:r>
-              <a:rPr sz="1700" b="0" i="1">
-                <a:solidFill>
-                  <a:srgbClr val="115F59"/>
+              <a:rPr sz="1700" b="0" i="0">
+                <a:solidFill>
+                  <a:srgbClr val="26231F"/>
                 </a:solidFill>
               </a:rPr>
               <a:t>잘 살겠습니다</a:t>
@@ -5306,14 +5630,14 @@
       </p:sp>
       <p:sp>
         <p:nvSpPr>
-          <p:cNvPr id="5" name="안내 문구"/>
+          <p:cNvPr id="7" name="안내 문구"/>
           <p:cNvSpPr txBox="1"/>
           <p:nvPr/>
         </p:nvSpPr>
         <p:spPr>
           <a:xfrm>
-            <a:off x="853418" y="4617720"/>
-            <a:ext cx="6095847" cy="914400"/>
+            <a:off x="822960" y="4754880"/>
+            <a:ext cx="5608179" cy="914400"/>
           </a:xfrm>
           <a:prstGeom prst="rect">
             <a:avLst/>
@@ -5334,7 +5658,7 @@
             <a:r>
               <a:rPr sz="1400" b="0" i="0">
                 <a:solidFill>
-                  <a:srgbClr val="666666"/>
+                  <a:srgbClr val="26231F"/>
                 </a:solidFill>
               </a:rPr>
               <a:t>신랑 이름 ♥ 신부 이름</a:t>
@@ -5361,34 +5685,34 @@
         <a:sysClr val="window" lastClr="FFFFFF"/>
       </a:lt1>
       <a:dk2>
-        <a:srgbClr val="115F59"/>
+        <a:srgbClr val="274935"/>
       </a:dk2>
       <a:lt2>
-        <a:srgbClr val="EEFCFB"/>
+        <a:srgbClr val="EAFDF2"/>
       </a:lt2>
       <a:accent1>
-        <a:srgbClr val="26C5B8"/>
+        <a:srgbClr val="7BEAA9"/>
       </a:accent1>
       <a:accent2>
-        <a:srgbClr val="209DB6"/>
+        <a:srgbClr val="9FEFE6"/>
       </a:accent2>
       <a:accent3>
-        <a:srgbClr val="115F59"/>
+        <a:srgbClr val="274935"/>
       </a:accent3>
       <a:accent4>
-        <a:srgbClr val="D1FAF7"/>
+        <a:srgbClr val="D1FAE2"/>
       </a:accent4>
       <a:accent5>
-        <a:srgbClr val="23B1B7"/>
+        <a:srgbClr val="8DECC8"/>
       </a:accent5>
       <a:accent6>
-        <a:srgbClr val="709F9B"/>
+        <a:srgbClr val="7D9286"/>
       </a:accent6>
       <a:hlink>
-        <a:srgbClr val="26C5B8"/>
+        <a:srgbClr val="7BEAA9"/>
       </a:hlink>
       <a:folHlink>
-        <a:srgbClr val="115F59"/>
+        <a:srgbClr val="274935"/>
       </a:folHlink>
     </a:clrScheme>
     <a:fontScheme name="Office">
